--- a/dist/weeks-2학기/서비스디자인_2학기_05주차_화면넓히기.pptx
+++ b/dist/weeks-2학기/서비스디자인_2학기_05주차_화면넓히기.pptx
@@ -5719,7 +5719,96 @@
         <p:spPr>
           <a:xfrm>
             <a:off x="640080" y="1627632"/>
-            <a:ext cx="5254600" cy="4078224"/>
+            <a:ext cx="5254600" cy="3712464"/>
+          </a:xfrm>
+          <a:prstGeom prst="rect">
+            <a:avLst/>
+          </a:prstGeom>
+          <a:solidFill>
+            <a:srgbClr val="FFFFFF"/>
+          </a:solidFill>
+          <a:ln w="12700">
+            <a:solidFill>
+              <a:srgbClr val="111111"/>
+            </a:solidFill>
+            <a:prstDash val="solid"/>
+          </a:ln>
+        </p:spPr>
+      </p:sp>
+      <p:sp>
+        <p:nvSpPr>
+          <p:cNvPr id="10" name="Shape 8"/>
+          <p:cNvSpPr/>
+          <p:nvPr/>
+        </p:nvSpPr>
+        <p:spPr>
+          <a:xfrm>
+            <a:off x="640080" y="1627632"/>
+            <a:ext cx="5254600" cy="64008"/>
+          </a:xfrm>
+          <a:prstGeom prst="rect">
+            <a:avLst/>
+          </a:prstGeom>
+          <a:solidFill>
+            <a:srgbClr val="111111"/>
+          </a:solidFill>
+          <a:ln w="12700">
+            <a:solidFill>
+              <a:srgbClr val="111111"/>
+            </a:solidFill>
+            <a:prstDash val="solid"/>
+          </a:ln>
+        </p:spPr>
+      </p:sp>
+      <p:sp>
+        <p:nvSpPr>
+          <p:cNvPr id="11" name="Text 9"/>
+          <p:cNvSpPr/>
+          <p:nvPr/>
+        </p:nvSpPr>
+        <p:spPr>
+          <a:xfrm>
+            <a:off x="1042416" y="1901952"/>
+            <a:ext cx="4449928" cy="365760"/>
+          </a:xfrm>
+          <a:prstGeom prst="rect">
+            <a:avLst/>
+          </a:prstGeom>
+          <a:noFill/>
+          <a:ln/>
+        </p:spPr>
+        <p:txBody>
+          <a:bodyPr wrap="square" lIns="0" tIns="0" rIns="0" bIns="0" rtlCol="0" anchor="ctr"/>
+          <a:lstStyle/>
+          <a:p>
+            <a:pPr indent="0" marL="0">
+              <a:buNone/>
+            </a:pPr>
+            <a:r>
+              <a:rPr lang="en-US" sz="1700" dirty="0">
+                <a:solidFill>
+                  <a:srgbClr val="111111"/>
+                </a:solidFill>
+                <a:latin typeface="Pretendard SemiBold" pitchFamily="34" charset="0"/>
+                <a:ea typeface="Pretendard SemiBold" pitchFamily="34" charset="-122"/>
+                <a:cs typeface="Pretendard SemiBold" pitchFamily="34" charset="-120"/>
+              </a:rPr>
+              <a:t>조립한 화면</a:t>
+            </a:r>
+            <a:endParaRPr lang="en-US" sz="1700" dirty="0"/>
+          </a:p>
+        </p:txBody>
+      </p:sp>
+      <p:sp>
+        <p:nvSpPr>
+          <p:cNvPr id="12" name="Shape 10"/>
+          <p:cNvSpPr/>
+          <p:nvPr/>
+        </p:nvSpPr>
+        <p:spPr>
+          <a:xfrm>
+            <a:off x="6297016" y="1627632"/>
+            <a:ext cx="5254600" cy="3712464"/>
           </a:xfrm>
           <a:prstGeom prst="rect">
             <a:avLst/>
@@ -5737,13 +5826,13 @@
       </p:sp>
       <p:sp>
         <p:nvSpPr>
-          <p:cNvPr id="10" name="Text 8"/>
-          <p:cNvSpPr/>
-          <p:nvPr/>
-        </p:nvSpPr>
-        <p:spPr>
-          <a:xfrm>
-            <a:off x="1042416" y="1901952"/>
+          <p:cNvPr id="13" name="Text 11"/>
+          <p:cNvSpPr/>
+          <p:nvPr/>
+        </p:nvSpPr>
+        <p:spPr>
+          <a:xfrm>
+            <a:off x="6699352" y="1901952"/>
             <a:ext cx="4449928" cy="365760"/>
           </a:xfrm>
           <a:prstGeom prst="rect">
@@ -5762,13 +5851,13 @@
             <a:r>
               <a:rPr lang="en-US" sz="1700" dirty="0">
                 <a:solidFill>
-                  <a:srgbClr val="111111"/>
+                  <a:srgbClr val="9B9B9B"/>
                 </a:solidFill>
                 <a:latin typeface="Pretendard SemiBold" pitchFamily="34" charset="0"/>
                 <a:ea typeface="Pretendard SemiBold" pitchFamily="34" charset="-122"/>
                 <a:cs typeface="Pretendard SemiBold" pitchFamily="34" charset="-120"/>
               </a:rPr>
-              <a:t>조립한 화면</a:t>
+              <a:t>그린 화면</a:t>
             </a:r>
             <a:endParaRPr lang="en-US" sz="1700" dirty="0"/>
           </a:p>
@@ -5776,71 +5865,7 @@
       </p:sp>
       <p:sp>
         <p:nvSpPr>
-          <p:cNvPr id="11" name="Shape 9"/>
-          <p:cNvSpPr/>
-          <p:nvPr/>
-        </p:nvSpPr>
-        <p:spPr>
-          <a:xfrm>
-            <a:off x="6297016" y="1627632"/>
-            <a:ext cx="5254600" cy="4078224"/>
-          </a:xfrm>
-          <a:prstGeom prst="rect">
-            <a:avLst/>
-          </a:prstGeom>
-          <a:solidFill>
-            <a:srgbClr val="FFFFFF"/>
-          </a:solidFill>
-          <a:ln w="12700">
-            <a:solidFill>
-              <a:srgbClr val="DCDCDC"/>
-            </a:solidFill>
-            <a:prstDash val="solid"/>
-          </a:ln>
-        </p:spPr>
-      </p:sp>
-      <p:sp>
-        <p:nvSpPr>
-          <p:cNvPr id="12" name="Text 10"/>
-          <p:cNvSpPr/>
-          <p:nvPr/>
-        </p:nvSpPr>
-        <p:spPr>
-          <a:xfrm>
-            <a:off x="6699352" y="1901952"/>
-            <a:ext cx="4449928" cy="365760"/>
-          </a:xfrm>
-          <a:prstGeom prst="rect">
-            <a:avLst/>
-          </a:prstGeom>
-          <a:noFill/>
-          <a:ln/>
-        </p:spPr>
-        <p:txBody>
-          <a:bodyPr wrap="square" lIns="0" tIns="0" rIns="0" bIns="0" rtlCol="0" anchor="ctr"/>
-          <a:lstStyle/>
-          <a:p>
-            <a:pPr indent="0" marL="0">
-              <a:buNone/>
-            </a:pPr>
-            <a:r>
-              <a:rPr lang="en-US" sz="1700" dirty="0">
-                <a:solidFill>
-                  <a:srgbClr val="9B9B9B"/>
-                </a:solidFill>
-                <a:latin typeface="Pretendard SemiBold" pitchFamily="34" charset="0"/>
-                <a:ea typeface="Pretendard SemiBold" pitchFamily="34" charset="-122"/>
-                <a:cs typeface="Pretendard SemiBold" pitchFamily="34" charset="-120"/>
-              </a:rPr>
-              <a:t>그린 화면</a:t>
-            </a:r>
-            <a:endParaRPr lang="en-US" sz="1700" dirty="0"/>
-          </a:p>
-        </p:txBody>
-      </p:sp>
-      <p:sp>
-        <p:nvSpPr>
-          <p:cNvPr id="13" name="Text 11"/>
+          <p:cNvPr id="14" name="Text 12"/>
           <p:cNvSpPr/>
           <p:nvPr/>
         </p:nvSpPr>
@@ -5879,14 +5904,14 @@
       </p:sp>
       <p:sp>
         <p:nvSpPr>
-          <p:cNvPr id="14" name="Text 12"/>
+          <p:cNvPr id="15" name="Text 13"/>
           <p:cNvSpPr/>
           <p:nvPr/>
         </p:nvSpPr>
         <p:spPr>
           <a:xfrm>
             <a:off x="1042416" y="2688336"/>
-            <a:ext cx="4449928" cy="384048"/>
+            <a:ext cx="4449928" cy="329184"/>
           </a:xfrm>
           <a:prstGeom prst="rect">
             <a:avLst/>
@@ -5905,7 +5930,7 @@
               <a:buNone/>
             </a:pPr>
             <a:r>
-              <a:rPr lang="en-US" sz="1150" dirty="0">
+              <a:rPr lang="en-US" sz="1150" b="1" dirty="0">
                 <a:solidFill>
                   <a:srgbClr val="1F1F1F"/>
                 </a:solidFill>
@@ -5921,7 +5946,7 @@
       </p:sp>
       <p:sp>
         <p:nvSpPr>
-          <p:cNvPr id="15" name="Text 13"/>
+          <p:cNvPr id="16" name="Text 14"/>
           <p:cNvSpPr/>
           <p:nvPr/>
         </p:nvSpPr>
@@ -5960,14 +5985,14 @@
       </p:sp>
       <p:sp>
         <p:nvSpPr>
-          <p:cNvPr id="16" name="Text 14"/>
+          <p:cNvPr id="17" name="Text 15"/>
           <p:cNvSpPr/>
           <p:nvPr/>
         </p:nvSpPr>
         <p:spPr>
           <a:xfrm>
             <a:off x="6699352" y="2688336"/>
-            <a:ext cx="4449928" cy="384048"/>
+            <a:ext cx="4449928" cy="329184"/>
           </a:xfrm>
           <a:prstGeom prst="rect">
             <a:avLst/>
@@ -6002,13 +6027,13 @@
       </p:sp>
       <p:sp>
         <p:nvSpPr>
-          <p:cNvPr id="17" name="Shape 15"/>
-          <p:cNvSpPr/>
-          <p:nvPr/>
-        </p:nvSpPr>
-        <p:spPr>
-          <a:xfrm>
-            <a:off x="1042416" y="3054096"/>
+          <p:cNvPr id="18" name="Shape 16"/>
+          <p:cNvSpPr/>
+          <p:nvPr/>
+        </p:nvSpPr>
+        <p:spPr>
+          <a:xfrm>
+            <a:off x="1042416" y="2980944"/>
             <a:ext cx="4449928" cy="7315"/>
           </a:xfrm>
           <a:prstGeom prst="rect">
@@ -6027,13 +6052,13 @@
       </p:sp>
       <p:sp>
         <p:nvSpPr>
-          <p:cNvPr id="18" name="Shape 16"/>
-          <p:cNvSpPr/>
-          <p:nvPr/>
-        </p:nvSpPr>
-        <p:spPr>
-          <a:xfrm>
-            <a:off x="6699352" y="3054096"/>
+          <p:cNvPr id="19" name="Shape 17"/>
+          <p:cNvSpPr/>
+          <p:nvPr/>
+        </p:nvSpPr>
+        <p:spPr>
+          <a:xfrm>
+            <a:off x="6699352" y="2980944"/>
             <a:ext cx="4449928" cy="7315"/>
           </a:xfrm>
           <a:prstGeom prst="rect">
@@ -6052,13 +6077,13 @@
       </p:sp>
       <p:sp>
         <p:nvSpPr>
-          <p:cNvPr id="19" name="Text 17"/>
-          <p:cNvSpPr/>
-          <p:nvPr/>
-        </p:nvSpPr>
-        <p:spPr>
-          <a:xfrm>
-            <a:off x="1042416" y="3108960"/>
+          <p:cNvPr id="20" name="Text 18"/>
+          <p:cNvSpPr/>
+          <p:nvPr/>
+        </p:nvSpPr>
+        <p:spPr>
+          <a:xfrm>
+            <a:off x="1042416" y="3035808"/>
             <a:ext cx="2011680" cy="274320"/>
           </a:xfrm>
           <a:prstGeom prst="rect">
@@ -6091,14 +6116,14 @@
       </p:sp>
       <p:sp>
         <p:nvSpPr>
-          <p:cNvPr id="20" name="Text 18"/>
-          <p:cNvSpPr/>
-          <p:nvPr/>
-        </p:nvSpPr>
-        <p:spPr>
-          <a:xfrm>
-            <a:off x="1042416" y="3346704"/>
-            <a:ext cx="4449928" cy="384048"/>
+          <p:cNvPr id="21" name="Text 19"/>
+          <p:cNvSpPr/>
+          <p:nvPr/>
+        </p:nvSpPr>
+        <p:spPr>
+          <a:xfrm>
+            <a:off x="1042416" y="3273552"/>
+            <a:ext cx="4449928" cy="329184"/>
           </a:xfrm>
           <a:prstGeom prst="rect">
             <a:avLst/>
@@ -6117,7 +6142,7 @@
               <a:buNone/>
             </a:pPr>
             <a:r>
-              <a:rPr lang="en-US" sz="1150" dirty="0">
+              <a:rPr lang="en-US" sz="1150" b="1" dirty="0">
                 <a:solidFill>
                   <a:srgbClr val="1F1F1F"/>
                 </a:solidFill>
@@ -6133,13 +6158,13 @@
       </p:sp>
       <p:sp>
         <p:nvSpPr>
-          <p:cNvPr id="21" name="Text 19"/>
-          <p:cNvSpPr/>
-          <p:nvPr/>
-        </p:nvSpPr>
-        <p:spPr>
-          <a:xfrm>
-            <a:off x="6699352" y="3108960"/>
+          <p:cNvPr id="22" name="Text 20"/>
+          <p:cNvSpPr/>
+          <p:nvPr/>
+        </p:nvSpPr>
+        <p:spPr>
+          <a:xfrm>
+            <a:off x="6699352" y="3035808"/>
             <a:ext cx="2011680" cy="274320"/>
           </a:xfrm>
           <a:prstGeom prst="rect">
@@ -6172,14 +6197,14 @@
       </p:sp>
       <p:sp>
         <p:nvSpPr>
-          <p:cNvPr id="22" name="Text 20"/>
-          <p:cNvSpPr/>
-          <p:nvPr/>
-        </p:nvSpPr>
-        <p:spPr>
-          <a:xfrm>
-            <a:off x="6699352" y="3346704"/>
-            <a:ext cx="4449928" cy="384048"/>
+          <p:cNvPr id="23" name="Text 21"/>
+          <p:cNvSpPr/>
+          <p:nvPr/>
+        </p:nvSpPr>
+        <p:spPr>
+          <a:xfrm>
+            <a:off x="6699352" y="3273552"/>
+            <a:ext cx="4449928" cy="329184"/>
           </a:xfrm>
           <a:prstGeom prst="rect">
             <a:avLst/>
@@ -6214,13 +6239,13 @@
       </p:sp>
       <p:sp>
         <p:nvSpPr>
-          <p:cNvPr id="23" name="Shape 21"/>
-          <p:cNvSpPr/>
-          <p:nvPr/>
-        </p:nvSpPr>
-        <p:spPr>
-          <a:xfrm>
-            <a:off x="1042416" y="3712464"/>
+          <p:cNvPr id="24" name="Shape 22"/>
+          <p:cNvSpPr/>
+          <p:nvPr/>
+        </p:nvSpPr>
+        <p:spPr>
+          <a:xfrm>
+            <a:off x="1042416" y="3566160"/>
             <a:ext cx="4449928" cy="7315"/>
           </a:xfrm>
           <a:prstGeom prst="rect">
@@ -6239,13 +6264,13 @@
       </p:sp>
       <p:sp>
         <p:nvSpPr>
-          <p:cNvPr id="24" name="Shape 22"/>
-          <p:cNvSpPr/>
-          <p:nvPr/>
-        </p:nvSpPr>
-        <p:spPr>
-          <a:xfrm>
-            <a:off x="6699352" y="3712464"/>
+          <p:cNvPr id="25" name="Shape 23"/>
+          <p:cNvSpPr/>
+          <p:nvPr/>
+        </p:nvSpPr>
+        <p:spPr>
+          <a:xfrm>
+            <a:off x="6699352" y="3566160"/>
             <a:ext cx="4449928" cy="7315"/>
           </a:xfrm>
           <a:prstGeom prst="rect">
@@ -6264,13 +6289,13 @@
       </p:sp>
       <p:sp>
         <p:nvSpPr>
-          <p:cNvPr id="25" name="Text 23"/>
-          <p:cNvSpPr/>
-          <p:nvPr/>
-        </p:nvSpPr>
-        <p:spPr>
-          <a:xfrm>
-            <a:off x="1042416" y="3767328"/>
+          <p:cNvPr id="26" name="Text 24"/>
+          <p:cNvSpPr/>
+          <p:nvPr/>
+        </p:nvSpPr>
+        <p:spPr>
+          <a:xfrm>
+            <a:off x="1042416" y="3621024"/>
             <a:ext cx="2011680" cy="274320"/>
           </a:xfrm>
           <a:prstGeom prst="rect">
@@ -6303,14 +6328,14 @@
       </p:sp>
       <p:sp>
         <p:nvSpPr>
-          <p:cNvPr id="26" name="Text 24"/>
-          <p:cNvSpPr/>
-          <p:nvPr/>
-        </p:nvSpPr>
-        <p:spPr>
-          <a:xfrm>
-            <a:off x="1042416" y="4005072"/>
-            <a:ext cx="4449928" cy="384048"/>
+          <p:cNvPr id="27" name="Text 25"/>
+          <p:cNvSpPr/>
+          <p:nvPr/>
+        </p:nvSpPr>
+        <p:spPr>
+          <a:xfrm>
+            <a:off x="1042416" y="3858768"/>
+            <a:ext cx="4449928" cy="329184"/>
           </a:xfrm>
           <a:prstGeom prst="rect">
             <a:avLst/>
@@ -6329,7 +6354,7 @@
               <a:buNone/>
             </a:pPr>
             <a:r>
-              <a:rPr lang="en-US" sz="1150" dirty="0">
+              <a:rPr lang="en-US" sz="1150" b="1" dirty="0">
                 <a:solidFill>
                   <a:srgbClr val="1F1F1F"/>
                 </a:solidFill>
@@ -6345,13 +6370,13 @@
       </p:sp>
       <p:sp>
         <p:nvSpPr>
-          <p:cNvPr id="27" name="Text 25"/>
-          <p:cNvSpPr/>
-          <p:nvPr/>
-        </p:nvSpPr>
-        <p:spPr>
-          <a:xfrm>
-            <a:off x="6699352" y="3767328"/>
+          <p:cNvPr id="28" name="Text 26"/>
+          <p:cNvSpPr/>
+          <p:nvPr/>
+        </p:nvSpPr>
+        <p:spPr>
+          <a:xfrm>
+            <a:off x="6699352" y="3621024"/>
             <a:ext cx="2011680" cy="274320"/>
           </a:xfrm>
           <a:prstGeom prst="rect">
@@ -6384,14 +6409,14 @@
       </p:sp>
       <p:sp>
         <p:nvSpPr>
-          <p:cNvPr id="28" name="Text 26"/>
-          <p:cNvSpPr/>
-          <p:nvPr/>
-        </p:nvSpPr>
-        <p:spPr>
-          <a:xfrm>
-            <a:off x="6699352" y="4005072"/>
-            <a:ext cx="4449928" cy="384048"/>
+          <p:cNvPr id="29" name="Text 27"/>
+          <p:cNvSpPr/>
+          <p:nvPr/>
+        </p:nvSpPr>
+        <p:spPr>
+          <a:xfrm>
+            <a:off x="6699352" y="3858768"/>
+            <a:ext cx="4449928" cy="329184"/>
           </a:xfrm>
           <a:prstGeom prst="rect">
             <a:avLst/>
@@ -6426,13 +6451,13 @@
       </p:sp>
       <p:sp>
         <p:nvSpPr>
-          <p:cNvPr id="29" name="Shape 27"/>
-          <p:cNvSpPr/>
-          <p:nvPr/>
-        </p:nvSpPr>
-        <p:spPr>
-          <a:xfrm>
-            <a:off x="1042416" y="4370832"/>
+          <p:cNvPr id="30" name="Shape 28"/>
+          <p:cNvSpPr/>
+          <p:nvPr/>
+        </p:nvSpPr>
+        <p:spPr>
+          <a:xfrm>
+            <a:off x="1042416" y="4151376"/>
             <a:ext cx="4449928" cy="7315"/>
           </a:xfrm>
           <a:prstGeom prst="rect">
@@ -6451,13 +6476,13 @@
       </p:sp>
       <p:sp>
         <p:nvSpPr>
-          <p:cNvPr id="30" name="Shape 28"/>
-          <p:cNvSpPr/>
-          <p:nvPr/>
-        </p:nvSpPr>
-        <p:spPr>
-          <a:xfrm>
-            <a:off x="6699352" y="4370832"/>
+          <p:cNvPr id="31" name="Shape 29"/>
+          <p:cNvSpPr/>
+          <p:nvPr/>
+        </p:nvSpPr>
+        <p:spPr>
+          <a:xfrm>
+            <a:off x="6699352" y="4151376"/>
             <a:ext cx="4449928" cy="7315"/>
           </a:xfrm>
           <a:prstGeom prst="rect">
@@ -6476,13 +6501,13 @@
       </p:sp>
       <p:sp>
         <p:nvSpPr>
-          <p:cNvPr id="31" name="Text 29"/>
-          <p:cNvSpPr/>
-          <p:nvPr/>
-        </p:nvSpPr>
-        <p:spPr>
-          <a:xfrm>
-            <a:off x="1042416" y="4425696"/>
+          <p:cNvPr id="32" name="Text 30"/>
+          <p:cNvSpPr/>
+          <p:nvPr/>
+        </p:nvSpPr>
+        <p:spPr>
+          <a:xfrm>
+            <a:off x="1042416" y="4206240"/>
             <a:ext cx="2011680" cy="274320"/>
           </a:xfrm>
           <a:prstGeom prst="rect">
@@ -6515,14 +6540,14 @@
       </p:sp>
       <p:sp>
         <p:nvSpPr>
-          <p:cNvPr id="32" name="Text 30"/>
-          <p:cNvSpPr/>
-          <p:nvPr/>
-        </p:nvSpPr>
-        <p:spPr>
-          <a:xfrm>
-            <a:off x="1042416" y="4663440"/>
-            <a:ext cx="4449928" cy="384048"/>
+          <p:cNvPr id="33" name="Text 31"/>
+          <p:cNvSpPr/>
+          <p:nvPr/>
+        </p:nvSpPr>
+        <p:spPr>
+          <a:xfrm>
+            <a:off x="1042416" y="4443984"/>
+            <a:ext cx="4449928" cy="329184"/>
           </a:xfrm>
           <a:prstGeom prst="rect">
             <a:avLst/>
@@ -6541,7 +6566,7 @@
               <a:buNone/>
             </a:pPr>
             <a:r>
-              <a:rPr lang="en-US" sz="1150" dirty="0">
+              <a:rPr lang="en-US" sz="1150" b="1" dirty="0">
                 <a:solidFill>
                   <a:srgbClr val="1F1F1F"/>
                 </a:solidFill>
@@ -6557,13 +6582,13 @@
       </p:sp>
       <p:sp>
         <p:nvSpPr>
-          <p:cNvPr id="33" name="Text 31"/>
-          <p:cNvSpPr/>
-          <p:nvPr/>
-        </p:nvSpPr>
-        <p:spPr>
-          <a:xfrm>
-            <a:off x="6699352" y="4425696"/>
+          <p:cNvPr id="34" name="Text 32"/>
+          <p:cNvSpPr/>
+          <p:nvPr/>
+        </p:nvSpPr>
+        <p:spPr>
+          <a:xfrm>
+            <a:off x="6699352" y="4206240"/>
             <a:ext cx="2011680" cy="274320"/>
           </a:xfrm>
           <a:prstGeom prst="rect">
@@ -6596,14 +6621,14 @@
       </p:sp>
       <p:sp>
         <p:nvSpPr>
-          <p:cNvPr id="34" name="Text 32"/>
-          <p:cNvSpPr/>
-          <p:nvPr/>
-        </p:nvSpPr>
-        <p:spPr>
-          <a:xfrm>
-            <a:off x="6699352" y="4663440"/>
-            <a:ext cx="4449928" cy="384048"/>
+          <p:cNvPr id="35" name="Text 33"/>
+          <p:cNvSpPr/>
+          <p:nvPr/>
+        </p:nvSpPr>
+        <p:spPr>
+          <a:xfrm>
+            <a:off x="6699352" y="4443984"/>
+            <a:ext cx="4449928" cy="329184"/>
           </a:xfrm>
           <a:prstGeom prst="rect">
             <a:avLst/>
@@ -6638,13 +6663,13 @@
       </p:sp>
       <p:sp>
         <p:nvSpPr>
-          <p:cNvPr id="35" name="Shape 33"/>
-          <p:cNvSpPr/>
-          <p:nvPr/>
-        </p:nvSpPr>
-        <p:spPr>
-          <a:xfrm>
-            <a:off x="1042416" y="5029200"/>
+          <p:cNvPr id="36" name="Shape 34"/>
+          <p:cNvSpPr/>
+          <p:nvPr/>
+        </p:nvSpPr>
+        <p:spPr>
+          <a:xfrm>
+            <a:off x="1042416" y="4736592"/>
             <a:ext cx="4449928" cy="7315"/>
           </a:xfrm>
           <a:prstGeom prst="rect">
@@ -6663,13 +6688,13 @@
       </p:sp>
       <p:sp>
         <p:nvSpPr>
-          <p:cNvPr id="36" name="Shape 34"/>
-          <p:cNvSpPr/>
-          <p:nvPr/>
-        </p:nvSpPr>
-        <p:spPr>
-          <a:xfrm>
-            <a:off x="6699352" y="5029200"/>
+          <p:cNvPr id="37" name="Shape 35"/>
+          <p:cNvSpPr/>
+          <p:nvPr/>
+        </p:nvSpPr>
+        <p:spPr>
+          <a:xfrm>
+            <a:off x="6699352" y="4736592"/>
             <a:ext cx="4449928" cy="7315"/>
           </a:xfrm>
           <a:prstGeom prst="rect">
@@ -6688,13 +6713,13 @@
       </p:sp>
       <p:sp>
         <p:nvSpPr>
-          <p:cNvPr id="37" name="Text 35"/>
-          <p:cNvSpPr/>
-          <p:nvPr/>
-        </p:nvSpPr>
-        <p:spPr>
-          <a:xfrm>
-            <a:off x="1042416" y="5084064"/>
+          <p:cNvPr id="38" name="Text 36"/>
+          <p:cNvSpPr/>
+          <p:nvPr/>
+        </p:nvSpPr>
+        <p:spPr>
+          <a:xfrm>
+            <a:off x="1042416" y="4791456"/>
             <a:ext cx="2011680" cy="274320"/>
           </a:xfrm>
           <a:prstGeom prst="rect">
@@ -6727,14 +6752,14 @@
       </p:sp>
       <p:sp>
         <p:nvSpPr>
-          <p:cNvPr id="38" name="Text 36"/>
-          <p:cNvSpPr/>
-          <p:nvPr/>
-        </p:nvSpPr>
-        <p:spPr>
-          <a:xfrm>
-            <a:off x="1042416" y="5321808"/>
-            <a:ext cx="4449928" cy="384048"/>
+          <p:cNvPr id="39" name="Text 37"/>
+          <p:cNvSpPr/>
+          <p:nvPr/>
+        </p:nvSpPr>
+        <p:spPr>
+          <a:xfrm>
+            <a:off x="1042416" y="5029200"/>
+            <a:ext cx="4449928" cy="329184"/>
           </a:xfrm>
           <a:prstGeom prst="rect">
             <a:avLst/>
@@ -6753,7 +6778,7 @@
               <a:buNone/>
             </a:pPr>
             <a:r>
-              <a:rPr lang="en-US" sz="1150" dirty="0">
+              <a:rPr lang="en-US" sz="1150" b="1" dirty="0">
                 <a:solidFill>
                   <a:srgbClr val="1F1F1F"/>
                 </a:solidFill>
@@ -6769,13 +6794,13 @@
       </p:sp>
       <p:sp>
         <p:nvSpPr>
-          <p:cNvPr id="39" name="Text 37"/>
-          <p:cNvSpPr/>
-          <p:nvPr/>
-        </p:nvSpPr>
-        <p:spPr>
-          <a:xfrm>
-            <a:off x="6699352" y="5084064"/>
+          <p:cNvPr id="40" name="Text 38"/>
+          <p:cNvSpPr/>
+          <p:nvPr/>
+        </p:nvSpPr>
+        <p:spPr>
+          <a:xfrm>
+            <a:off x="6699352" y="4791456"/>
             <a:ext cx="2011680" cy="274320"/>
           </a:xfrm>
           <a:prstGeom prst="rect">
@@ -6808,14 +6833,14 @@
       </p:sp>
       <p:sp>
         <p:nvSpPr>
-          <p:cNvPr id="40" name="Text 38"/>
-          <p:cNvSpPr/>
-          <p:nvPr/>
-        </p:nvSpPr>
-        <p:spPr>
-          <a:xfrm>
-            <a:off x="6699352" y="5321808"/>
-            <a:ext cx="4449928" cy="384048"/>
+          <p:cNvPr id="41" name="Text 39"/>
+          <p:cNvSpPr/>
+          <p:nvPr/>
+        </p:nvSpPr>
+        <p:spPr>
+          <a:xfrm>
+            <a:off x="6699352" y="5029200"/>
+            <a:ext cx="4449928" cy="329184"/>
           </a:xfrm>
           <a:prstGeom prst="rect">
             <a:avLst/>
@@ -6850,7 +6875,74 @@
       </p:sp>
       <p:sp>
         <p:nvSpPr>
-          <p:cNvPr id="41" name="Shape 39"/>
+          <p:cNvPr id="42" name="Shape 40"/>
+          <p:cNvSpPr/>
+          <p:nvPr/>
+        </p:nvSpPr>
+        <p:spPr>
+          <a:xfrm>
+            <a:off x="640080" y="5596128"/>
+            <a:ext cx="10911535" cy="7315"/>
+          </a:xfrm>
+          <a:prstGeom prst="rect">
+            <a:avLst/>
+          </a:prstGeom>
+          <a:solidFill>
+            <a:srgbClr val="111111"/>
+          </a:solidFill>
+          <a:ln w="12700">
+            <a:solidFill>
+              <a:srgbClr val="111111"/>
+            </a:solidFill>
+            <a:prstDash val="solid"/>
+          </a:ln>
+        </p:spPr>
+      </p:sp>
+      <p:sp>
+        <p:nvSpPr>
+          <p:cNvPr id="43" name="Text 41"/>
+          <p:cNvSpPr/>
+          <p:nvPr/>
+        </p:nvSpPr>
+        <p:spPr>
+          <a:xfrm>
+            <a:off x="640080" y="5705856"/>
+            <a:ext cx="10911535" cy="402336"/>
+          </a:xfrm>
+          <a:prstGeom prst="rect">
+            <a:avLst/>
+          </a:prstGeom>
+          <a:noFill/>
+          <a:ln/>
+        </p:spPr>
+        <p:txBody>
+          <a:bodyPr wrap="square" lIns="0" tIns="0" rIns="0" bIns="0" rtlCol="0" anchor="t"/>
+          <a:lstStyle/>
+          <a:p>
+            <a:pPr indent="0" marL="0">
+              <a:lnSpc>
+                <a:spcPct val="120000"/>
+              </a:lnSpc>
+              <a:buNone/>
+            </a:pPr>
+            <a:r>
+              <a:rPr lang="en-US" sz="1300" b="1" dirty="0">
+                <a:solidFill>
+                  <a:srgbClr val="111111"/>
+                </a:solidFill>
+                <a:latin typeface="Pretendard" pitchFamily="34" charset="0"/>
+                <a:ea typeface="Pretendard" pitchFamily="34" charset="-122"/>
+                <a:cs typeface="Pretendard" pitchFamily="34" charset="-120"/>
+              </a:rPr>
+              <a:t>오른쪽으로 가면 지난 세 주 동안 만든 것이 없던 일이 됩니다.</a:t>
+            </a:r>
+            <a:endParaRPr lang="en-US" sz="1300" dirty="0"/>
+          </a:p>
+        </p:txBody>
+      </p:sp>
+      <p:sp>
+        <p:nvSpPr>
+          <p:cNvPr id="44" name="Shape 42"/>
           <p:cNvSpPr/>
           <p:nvPr/>
         </p:nvSpPr>
@@ -6875,7 +6967,7 @@
       </p:sp>
       <p:sp>
         <p:nvSpPr>
-          <p:cNvPr id="42" name="Text 40"/>
+          <p:cNvPr id="45" name="Text 43"/>
           <p:cNvSpPr/>
           <p:nvPr/>
         </p:nvSpPr>
@@ -6914,7 +7006,7 @@
       </p:sp>
       <p:sp>
         <p:nvSpPr>
-          <p:cNvPr id="43" name="Text 41"/>
+          <p:cNvPr id="46" name="Text 44"/>
           <p:cNvSpPr/>
           <p:nvPr/>
         </p:nvSpPr>
@@ -17277,7 +17369,7 @@
         <p:spPr>
           <a:xfrm>
             <a:off x="640080" y="1627632"/>
-            <a:ext cx="5254600" cy="4078224"/>
+            <a:ext cx="5254600" cy="3712464"/>
           </a:xfrm>
           <a:prstGeom prst="rect">
             <a:avLst/>
@@ -17341,7 +17433,7 @@
         <p:spPr>
           <a:xfrm>
             <a:off x="6297016" y="1627632"/>
-            <a:ext cx="5254600" cy="4078224"/>
+            <a:ext cx="5254600" cy="3712464"/>
           </a:xfrm>
           <a:prstGeom prst="rect">
             <a:avLst/>
@@ -17444,7 +17536,7 @@
         <p:spPr>
           <a:xfrm>
             <a:off x="1042416" y="2688336"/>
-            <a:ext cx="4449928" cy="384048"/>
+            <a:ext cx="4449928" cy="329184"/>
           </a:xfrm>
           <a:prstGeom prst="rect">
             <a:avLst/>
@@ -17525,7 +17617,7 @@
         <p:spPr>
           <a:xfrm>
             <a:off x="6699352" y="2688336"/>
-            <a:ext cx="4449928" cy="384048"/>
+            <a:ext cx="4449928" cy="329184"/>
           </a:xfrm>
           <a:prstGeom prst="rect">
             <a:avLst/>
@@ -17566,7 +17658,7 @@
         </p:nvSpPr>
         <p:spPr>
           <a:xfrm>
-            <a:off x="1042416" y="3054096"/>
+            <a:off x="1042416" y="2980944"/>
             <a:ext cx="4449928" cy="7315"/>
           </a:xfrm>
           <a:prstGeom prst="rect">
@@ -17591,7 +17683,7 @@
         </p:nvSpPr>
         <p:spPr>
           <a:xfrm>
-            <a:off x="6699352" y="3054096"/>
+            <a:off x="6699352" y="2980944"/>
             <a:ext cx="4449928" cy="7315"/>
           </a:xfrm>
           <a:prstGeom prst="rect">
@@ -17616,7 +17708,7 @@
         </p:nvSpPr>
         <p:spPr>
           <a:xfrm>
-            <a:off x="1042416" y="3108960"/>
+            <a:off x="1042416" y="3035808"/>
             <a:ext cx="2011680" cy="274320"/>
           </a:xfrm>
           <a:prstGeom prst="rect">
@@ -17655,8 +17747,8 @@
         </p:nvSpPr>
         <p:spPr>
           <a:xfrm>
-            <a:off x="1042416" y="3346704"/>
-            <a:ext cx="4449928" cy="384048"/>
+            <a:off x="1042416" y="3273552"/>
+            <a:ext cx="4449928" cy="329184"/>
           </a:xfrm>
           <a:prstGeom prst="rect">
             <a:avLst/>
@@ -17697,7 +17789,7 @@
         </p:nvSpPr>
         <p:spPr>
           <a:xfrm>
-            <a:off x="6699352" y="3108960"/>
+            <a:off x="6699352" y="3035808"/>
             <a:ext cx="2011680" cy="274320"/>
           </a:xfrm>
           <a:prstGeom prst="rect">
@@ -17736,8 +17828,8 @@
         </p:nvSpPr>
         <p:spPr>
           <a:xfrm>
-            <a:off x="6699352" y="3346704"/>
-            <a:ext cx="4449928" cy="384048"/>
+            <a:off x="6699352" y="3273552"/>
+            <a:ext cx="4449928" cy="329184"/>
           </a:xfrm>
           <a:prstGeom prst="rect">
             <a:avLst/>
@@ -17778,7 +17870,7 @@
         </p:nvSpPr>
         <p:spPr>
           <a:xfrm>
-            <a:off x="1042416" y="3712464"/>
+            <a:off x="1042416" y="3566160"/>
             <a:ext cx="4449928" cy="7315"/>
           </a:xfrm>
           <a:prstGeom prst="rect">
@@ -17803,7 +17895,7 @@
         </p:nvSpPr>
         <p:spPr>
           <a:xfrm>
-            <a:off x="6699352" y="3712464"/>
+            <a:off x="6699352" y="3566160"/>
             <a:ext cx="4449928" cy="7315"/>
           </a:xfrm>
           <a:prstGeom prst="rect">
@@ -17828,7 +17920,7 @@
         </p:nvSpPr>
         <p:spPr>
           <a:xfrm>
-            <a:off x="1042416" y="3767328"/>
+            <a:off x="1042416" y="3621024"/>
             <a:ext cx="2011680" cy="274320"/>
           </a:xfrm>
           <a:prstGeom prst="rect">
@@ -17867,8 +17959,8 @@
         </p:nvSpPr>
         <p:spPr>
           <a:xfrm>
-            <a:off x="1042416" y="4005072"/>
-            <a:ext cx="4449928" cy="384048"/>
+            <a:off x="1042416" y="3858768"/>
+            <a:ext cx="4449928" cy="329184"/>
           </a:xfrm>
           <a:prstGeom prst="rect">
             <a:avLst/>
@@ -17909,7 +18001,7 @@
         </p:nvSpPr>
         <p:spPr>
           <a:xfrm>
-            <a:off x="6699352" y="3767328"/>
+            <a:off x="6699352" y="3621024"/>
             <a:ext cx="2011680" cy="274320"/>
           </a:xfrm>
           <a:prstGeom prst="rect">
@@ -17948,8 +18040,8 @@
         </p:nvSpPr>
         <p:spPr>
           <a:xfrm>
-            <a:off x="6699352" y="4005072"/>
-            <a:ext cx="4449928" cy="384048"/>
+            <a:off x="6699352" y="3858768"/>
+            <a:ext cx="4449928" cy="329184"/>
           </a:xfrm>
           <a:prstGeom prst="rect">
             <a:avLst/>
@@ -17990,7 +18082,7 @@
         </p:nvSpPr>
         <p:spPr>
           <a:xfrm>
-            <a:off x="1042416" y="4370832"/>
+            <a:off x="1042416" y="4151376"/>
             <a:ext cx="4449928" cy="7315"/>
           </a:xfrm>
           <a:prstGeom prst="rect">
@@ -18015,7 +18107,7 @@
         </p:nvSpPr>
         <p:spPr>
           <a:xfrm>
-            <a:off x="6699352" y="4370832"/>
+            <a:off x="6699352" y="4151376"/>
             <a:ext cx="4449928" cy="7315"/>
           </a:xfrm>
           <a:prstGeom prst="rect">
@@ -18040,7 +18132,7 @@
         </p:nvSpPr>
         <p:spPr>
           <a:xfrm>
-            <a:off x="1042416" y="4425696"/>
+            <a:off x="1042416" y="4206240"/>
             <a:ext cx="2011680" cy="274320"/>
           </a:xfrm>
           <a:prstGeom prst="rect">
@@ -18079,8 +18171,8 @@
         </p:nvSpPr>
         <p:spPr>
           <a:xfrm>
-            <a:off x="1042416" y="4663440"/>
-            <a:ext cx="4449928" cy="384048"/>
+            <a:off x="1042416" y="4443984"/>
+            <a:ext cx="4449928" cy="329184"/>
           </a:xfrm>
           <a:prstGeom prst="rect">
             <a:avLst/>
@@ -18121,7 +18213,7 @@
         </p:nvSpPr>
         <p:spPr>
           <a:xfrm>
-            <a:off x="6699352" y="4425696"/>
+            <a:off x="6699352" y="4206240"/>
             <a:ext cx="2011680" cy="274320"/>
           </a:xfrm>
           <a:prstGeom prst="rect">
@@ -18160,8 +18252,8 @@
         </p:nvSpPr>
         <p:spPr>
           <a:xfrm>
-            <a:off x="6699352" y="4663440"/>
-            <a:ext cx="4449928" cy="384048"/>
+            <a:off x="6699352" y="4443984"/>
+            <a:ext cx="4449928" cy="329184"/>
           </a:xfrm>
           <a:prstGeom prst="rect">
             <a:avLst/>
@@ -18202,7 +18294,7 @@
         </p:nvSpPr>
         <p:spPr>
           <a:xfrm>
-            <a:off x="1042416" y="5029200"/>
+            <a:off x="1042416" y="4736592"/>
             <a:ext cx="4449928" cy="7315"/>
           </a:xfrm>
           <a:prstGeom prst="rect">
@@ -18227,7 +18319,7 @@
         </p:nvSpPr>
         <p:spPr>
           <a:xfrm>
-            <a:off x="6699352" y="5029200"/>
+            <a:off x="6699352" y="4736592"/>
             <a:ext cx="4449928" cy="7315"/>
           </a:xfrm>
           <a:prstGeom prst="rect">
@@ -18252,7 +18344,7 @@
         </p:nvSpPr>
         <p:spPr>
           <a:xfrm>
-            <a:off x="1042416" y="5084064"/>
+            <a:off x="1042416" y="4791456"/>
             <a:ext cx="2011680" cy="274320"/>
           </a:xfrm>
           <a:prstGeom prst="rect">
@@ -18291,8 +18383,8 @@
         </p:nvSpPr>
         <p:spPr>
           <a:xfrm>
-            <a:off x="1042416" y="5321808"/>
-            <a:ext cx="4449928" cy="384048"/>
+            <a:off x="1042416" y="5029200"/>
+            <a:ext cx="4449928" cy="329184"/>
           </a:xfrm>
           <a:prstGeom prst="rect">
             <a:avLst/>
@@ -18333,7 +18425,7 @@
         </p:nvSpPr>
         <p:spPr>
           <a:xfrm>
-            <a:off x="6699352" y="5084064"/>
+            <a:off x="6699352" y="4791456"/>
             <a:ext cx="2011680" cy="274320"/>
           </a:xfrm>
           <a:prstGeom prst="rect">
@@ -18372,8 +18464,8 @@
         </p:nvSpPr>
         <p:spPr>
           <a:xfrm>
-            <a:off x="6699352" y="5321808"/>
-            <a:ext cx="4449928" cy="384048"/>
+            <a:off x="6699352" y="5029200"/>
+            <a:ext cx="4449928" cy="329184"/>
           </a:xfrm>
           <a:prstGeom prst="rect">
             <a:avLst/>
@@ -18409,6 +18501,73 @@
       <p:sp>
         <p:nvSpPr>
           <p:cNvPr id="41" name="Shape 39"/>
+          <p:cNvSpPr/>
+          <p:nvPr/>
+        </p:nvSpPr>
+        <p:spPr>
+          <a:xfrm>
+            <a:off x="640080" y="5596128"/>
+            <a:ext cx="10911535" cy="7315"/>
+          </a:xfrm>
+          <a:prstGeom prst="rect">
+            <a:avLst/>
+          </a:prstGeom>
+          <a:solidFill>
+            <a:srgbClr val="111111"/>
+          </a:solidFill>
+          <a:ln w="12700">
+            <a:solidFill>
+              <a:srgbClr val="111111"/>
+            </a:solidFill>
+            <a:prstDash val="solid"/>
+          </a:ln>
+        </p:spPr>
+      </p:sp>
+      <p:sp>
+        <p:nvSpPr>
+          <p:cNvPr id="42" name="Text 40"/>
+          <p:cNvSpPr/>
+          <p:nvPr/>
+        </p:nvSpPr>
+        <p:spPr>
+          <a:xfrm>
+            <a:off x="640080" y="5705856"/>
+            <a:ext cx="10911535" cy="402336"/>
+          </a:xfrm>
+          <a:prstGeom prst="rect">
+            <a:avLst/>
+          </a:prstGeom>
+          <a:noFill/>
+          <a:ln/>
+        </p:spPr>
+        <p:txBody>
+          <a:bodyPr wrap="square" lIns="0" tIns="0" rIns="0" bIns="0" rtlCol="0" anchor="t"/>
+          <a:lstStyle/>
+          <a:p>
+            <a:pPr indent="0" marL="0">
+              <a:lnSpc>
+                <a:spcPct val="120000"/>
+              </a:lnSpc>
+              <a:buNone/>
+            </a:pPr>
+            <a:r>
+              <a:rPr lang="en-US" sz="1300" b="1" dirty="0">
+                <a:solidFill>
+                  <a:srgbClr val="111111"/>
+                </a:solidFill>
+                <a:latin typeface="Pretendard" pitchFamily="34" charset="0"/>
+                <a:ea typeface="Pretendard" pitchFamily="34" charset="-122"/>
+                <a:cs typeface="Pretendard" pitchFamily="34" charset="-120"/>
+              </a:rPr>
+              <a:t>세그먼트 탭으로 큰 영역을 오가게 만들면 사용자가 길을 잃습니다. 그 반대도 마찬가지입니다.</a:t>
+            </a:r>
+            <a:endParaRPr lang="en-US" sz="1300" dirty="0"/>
+          </a:p>
+        </p:txBody>
+      </p:sp>
+      <p:sp>
+        <p:nvSpPr>
+          <p:cNvPr id="43" name="Shape 41"/>
           <p:cNvSpPr/>
           <p:nvPr/>
         </p:nvSpPr>
@@ -18433,7 +18592,7 @@
       </p:sp>
       <p:sp>
         <p:nvSpPr>
-          <p:cNvPr id="42" name="Text 40"/>
+          <p:cNvPr id="44" name="Text 42"/>
           <p:cNvSpPr/>
           <p:nvPr/>
         </p:nvSpPr>
@@ -18472,7 +18631,7 @@
       </p:sp>
       <p:sp>
         <p:nvSpPr>
-          <p:cNvPr id="43" name="Text 41"/>
+          <p:cNvPr id="45" name="Text 43"/>
           <p:cNvSpPr/>
           <p:nvPr/>
         </p:nvSpPr>
